--- a/presentation/final_project_presentation.pptx
+++ b/presentation/final_project_presentation.pptx
@@ -3243,15 +3243,30 @@
               </a:defRPr>
             </a:pPr>
             <a:r>
-              <a:t>Author: Undergraduate Student in Applied Geophysics  |  Antigravity IDE Assistant</a:t>
-            </a:r>
-            <a:br/>
-            <a:r>
-              <a:t>Dataset: BigEarthNet v2.0 (Sentinel-2 Level-2A BOA Surface Reflectance)</a:t>
-            </a:r>
-            <a:br/>
-            <a:r>
-              <a:t>Date: October 2026</a:t>
+              <a:rPr sz="1300">
+                <a:solidFill>
+                  <a:srgbClr val="94A3B8"/>
+                </a:solidFill>
+              </a:rPr>
+              <a:t>Author: Sai Charan (Mandala Sai Charan)  |  Admission No.: 24JE1093
+</a:t>
+            </a:r>
+            <a:r>
+              <a:rPr sz="1300">
+                <a:solidFill>
+                  <a:srgbClr val="94A3B8"/>
+                </a:solidFill>
+              </a:rPr>
+              <a:t>Course: Applied Remote Sensing Practical  |  Department: Applied Geophysics, IIT (ISM) Dhanbad
+</a:t>
+            </a:r>
+            <a:r>
+              <a:rPr sz="1300">
+                <a:solidFill>
+                  <a:srgbClr val="94A3B8"/>
+                </a:solidFill>
+              </a:rPr>
+              <a:t>Dataset: BigEarthNet v2.0 (Sentinel-2 Level-2A BOA Surface Reflectance)  |  Date: October 2026</a:t>
             </a:r>
           </a:p>
         </p:txBody>
@@ -3454,17 +3469,30 @@
               </a:defRPr>
             </a:pPr>
             <a:r>
-              <a:t>• Multi-label recognition is vital: 82% of European landscape patches have multiple classes.</a:t>
-            </a:r>
-            <a:br/>
-            <a:br/>
-            <a:r>
-              <a:t>• NIR is the most valuable spectral addition: M2 (Visible+NIR) gained +11.32 pp Macro-F1 and tripled Exact Match (38%).</a:t>
-            </a:r>
-            <a:br/>
-            <a:br/>
-            <a:r>
-              <a:t>• SWIR overfit on small samples: 6 channels without pre-training increased variance and degraded performance.</a:t>
+              <a:rPr sz="1050">
+                <a:solidFill>
+                  <a:srgbClr val="1E293B"/>
+                </a:solidFill>
+              </a:rPr>
+              <a:t>• Multi-label recognition is vital: 94.4% of patches in our curated dataset contain at least two land-cover classes.
+</a:t>
+            </a:r>
+            <a:r>
+              <a:rPr sz="1050">
+                <a:solidFill>
+                  <a:srgbClr val="1E293B"/>
+                </a:solidFill>
+              </a:rPr>
+              <a:t>• NIR is the most valuable spectral addition: M2 (Visible+NIR) gained +11.32 pp Macro-F1 and tripled Exact Match (38%).
+</a:t>
+            </a:r>
+            <a:r>
+              <a:rPr sz="1050">
+                <a:solidFill>
+                  <a:srgbClr val="1E293B"/>
+                </a:solidFill>
+              </a:rPr>
+              <a:t>• Performance of M3: The six-band model (M3) performed worse than the RGB+NIR model (M2) on the observed test metrics. Small sample size, spectral collinearity, resampling effects, and optimization instability are possible explanations, but they were not independently tested.</a:t>
             </a:r>
           </a:p>
         </p:txBody>
@@ -3965,15 +3993,15 @@
                   <a:srgbClr val="1E293B"/>
                 </a:solidFill>
               </a:rPr>
-              <a:t>• 82.0% Empirical Multi-Label Prevalence:</a:t>
-            </a:r>
-            <a:r>
-              <a:rPr sz="1300">
-                <a:solidFill>
-                  <a:srgbClr val="1E293B"/>
-                </a:solidFill>
-              </a:rPr>
-              <a:t> Over 8 out of 10 patches in our dataset contain multiple simultaneous land covers!</a:t>
+              <a:t>• 94.4% Empirical Multi-Label Prevalence:</a:t>
+            </a:r>
+            <a:r>
+              <a:rPr b="0" sz="1300">
+                <a:solidFill>
+                  <a:srgbClr val="1E293B"/>
+                </a:solidFill>
+              </a:rPr>
+              <a:t> 94.4% of patches in our curated dataset contain at least two land-cover classes.</a:t>
             </a:r>
           </a:p>
           <a:p>
@@ -6860,7 +6888,7 @@
               </a:spcAft>
             </a:pPr>
             <a:r>
-              <a:rPr b="1" sz="1100">
+              <a:rPr b="1" sz="1050">
                 <a:solidFill>
                   <a:srgbClr val="1E293B"/>
                 </a:solidFill>
@@ -6868,12 +6896,12 @@
               <a:t>• M3 (Multispectral):</a:t>
             </a:r>
             <a:r>
-              <a:rPr sz="1100">
-                <a:solidFill>
-                  <a:srgbClr val="1E293B"/>
-                </a:solidFill>
-              </a:rPr>
-              <a:t> Macro-F1 = 0.5673, Micro-F1 = 0.7081, Exact Match = 5.0%. Underperformed due to dimensionality &amp; overfitting.</a:t>
+              <a:rPr b="0" sz="1050">
+                <a:solidFill>
+                  <a:srgbClr val="1E293B"/>
+                </a:solidFill>
+              </a:rPr>
+              <a:t> Macro-F1 = 0.5673, Micro-F1 = 0.7081, Exact Match = 5.0%. The six-band model (M3) underperformed compared with the RGB+NIR model (M2) on the observed test metrics. Possible explanations include the small training sample, spectral collinearity, resampling effects, and optimization instability. These explanations were not independently tested.</a:t>
             </a:r>
           </a:p>
           <a:p>
